--- a/Food_Waste_Analytics_Presentation.pptx
+++ b/Food_Waste_Analytics_Presentation.pptx
@@ -3412,7 +3412,7 @@
               </a:rPr>
               <a:t>• Technology Stack: Python, Streamlit, Plotly, Pandas, NumPy, Scikit-Learn, Statsmodels (ARIMA), SQLite
 • Evaluation Criteria: EDA, Outlier Profiling, Time-Series Smoothing, Regression Modeling &amp; Decision Support
-• Presenter: [Student Name / Group Members] | Department of Computer Science &amp; Engineering</a:t>
+• Project Team: Shubhi Kumari &amp; Shaivi Bhasin | Department of Computer Science &amp; Engineering</a:t>
             </a:r>
           </a:p>
         </p:txBody>
